--- a/IT002-OOP/Slide lý thuyết/Inherit.pptx
+++ b/IT002-OOP/Slide lý thuyết/Inherit.pptx
@@ -5,7 +5,7 @@
     <p:sldMasterId id="2147483648" r:id="rId1"/>
   </p:sldMasterIdLst>
   <p:notesMasterIdLst>
-    <p:notesMasterId r:id="rId18"/>
+    <p:notesMasterId r:id="rId19"/>
   </p:notesMasterIdLst>
   <p:sldIdLst>
     <p:sldId id="256" r:id="rId2"/>
@@ -23,7 +23,8 @@
     <p:sldId id="1023" r:id="rId14"/>
     <p:sldId id="1024" r:id="rId15"/>
     <p:sldId id="1025" r:id="rId16"/>
-    <p:sldId id="1026" r:id="rId17"/>
+    <p:sldId id="1027" r:id="rId17"/>
+    <p:sldId id="1026" r:id="rId18"/>
   </p:sldIdLst>
   <p:sldSz cx="12192000" cy="6858000"/>
   <p:notesSz cx="6858000" cy="9144000"/>
@@ -211,7 +212,7 @@
           </a:lstStyle>
           <a:p>
             <a:fld id="{77F5E20D-330D-AE4A-A6A6-1850AD2ED2D6}" type="datetimeFigureOut">
-              <a:t>28/1/26</a:t>
+              <a:t>24/3/26</a:t>
             </a:fld>
             <a:endParaRPr lang="en-VN"/>
           </a:p>
@@ -1542,7 +1543,7 @@
           <a:lstStyle/>
           <a:p>
             <a:fld id="{B19CC23C-BA29-DE42-B018-0A671B23AB5C}" type="datetime1">
-              <a:t>28/1/26</a:t>
+              <a:t>24/3/26</a:t>
             </a:fld>
             <a:endParaRPr lang="en-VN"/>
           </a:p>
@@ -1740,7 +1741,7 @@
           <a:lstStyle/>
           <a:p>
             <a:fld id="{4C98E9E1-1963-2549-A392-0CE442C818D3}" type="datetime1">
-              <a:t>28/1/26</a:t>
+              <a:t>24/3/26</a:t>
             </a:fld>
             <a:endParaRPr lang="en-VN"/>
           </a:p>
@@ -1948,7 +1949,7 @@
           <a:lstStyle/>
           <a:p>
             <a:fld id="{C7AFA920-85BE-4747-816A-47AD76A510FA}" type="datetime1">
-              <a:t>28/1/26</a:t>
+              <a:t>24/3/26</a:t>
             </a:fld>
             <a:endParaRPr lang="en-VN"/>
           </a:p>
@@ -2146,7 +2147,7 @@
           <a:lstStyle/>
           <a:p>
             <a:fld id="{AAD3D96D-7531-BC47-A011-B5D6B3D43310}" type="datetime1">
-              <a:t>28/1/26</a:t>
+              <a:t>24/3/26</a:t>
             </a:fld>
             <a:endParaRPr lang="en-VN"/>
           </a:p>
@@ -2456,7 +2457,7 @@
           <a:lstStyle/>
           <a:p>
             <a:fld id="{9099FF25-CCF5-1749-B789-DEA9DF3915D1}" type="datetime1">
-              <a:t>28/1/26</a:t>
+              <a:t>24/3/26</a:t>
             </a:fld>
             <a:endParaRPr lang="en-VN"/>
           </a:p>
@@ -2722,7 +2723,7 @@
           <a:lstStyle/>
           <a:p>
             <a:fld id="{96C9BD3F-C60C-8F40-A1AA-746E79F526C8}" type="datetime1">
-              <a:t>28/1/26</a:t>
+              <a:t>24/3/26</a:t>
             </a:fld>
             <a:endParaRPr lang="en-VN"/>
           </a:p>
@@ -3135,7 +3136,7 @@
           <a:lstStyle/>
           <a:p>
             <a:fld id="{A8563D55-6338-8241-BEA3-C8267015B326}" type="datetime1">
-              <a:t>28/1/26</a:t>
+              <a:t>24/3/26</a:t>
             </a:fld>
             <a:endParaRPr lang="en-VN"/>
           </a:p>
@@ -3275,7 +3276,7 @@
           <a:lstStyle/>
           <a:p>
             <a:fld id="{89782EF4-4D34-8E49-9BB8-7FCD8F64F56C}" type="datetime1">
-              <a:t>28/1/26</a:t>
+              <a:t>24/3/26</a:t>
             </a:fld>
             <a:endParaRPr lang="en-VN"/>
           </a:p>
@@ -3386,7 +3387,7 @@
           <a:lstStyle/>
           <a:p>
             <a:fld id="{8A835D4F-1253-B847-8798-F89DBC53ECA3}" type="datetime1">
-              <a:t>28/1/26</a:t>
+              <a:t>24/3/26</a:t>
             </a:fld>
             <a:endParaRPr lang="en-VN"/>
           </a:p>
@@ -3697,7 +3698,7 @@
           <a:lstStyle/>
           <a:p>
             <a:fld id="{7B60E56D-C72A-354F-B0FC-65EC27F745C6}" type="datetime1">
-              <a:t>28/1/26</a:t>
+              <a:t>24/3/26</a:t>
             </a:fld>
             <a:endParaRPr lang="en-VN"/>
           </a:p>
@@ -3984,7 +3985,7 @@
           <a:lstStyle/>
           <a:p>
             <a:fld id="{D4EEE616-05B3-E949-A580-BAD4E917BCA4}" type="datetime1">
-              <a:t>28/1/26</a:t>
+              <a:t>24/3/26</a:t>
             </a:fld>
             <a:endParaRPr lang="en-VN"/>
           </a:p>
@@ -4225,7 +4226,7 @@
           </a:lstStyle>
           <a:p>
             <a:fld id="{D2508FC7-06EA-184C-B437-1FD4117B159D}" type="datetime1">
-              <a:t>28/1/26</a:t>
+              <a:t>24/3/26</a:t>
             </a:fld>
             <a:endParaRPr lang="en-VN"/>
           </a:p>
@@ -15144,7 +15145,7 @@
           <p:cNvPr id="2" name="Title 1">
             <a:extLst>
               <a:ext uri="{FF2B5EF4-FFF2-40B4-BE49-F238E27FC236}">
-                <a16:creationId xmlns:a16="http://schemas.microsoft.com/office/drawing/2014/main" id="{22A05B3F-846C-1748-26A7-94E726E9D4A3}"/>
+                <a16:creationId xmlns:a16="http://schemas.microsoft.com/office/drawing/2014/main" id="{D87F3C16-E474-5230-06FB-E9681CF3CFF4}"/>
               </a:ext>
             </a:extLst>
           </p:cNvPr>
@@ -15161,10 +15162,9 @@
           <a:lstStyle/>
           <a:p>
             <a:r>
-              <a:rPr lang="en-US"/>
-              <a:t>Multiple inheritance (2/2)</a:t>
+              <a:rPr lang="en-VN"/>
+              <a:t>Bài tập</a:t>
             </a:r>
-            <a:endParaRPr lang="en-VN"/>
           </a:p>
         </p:txBody>
       </p:sp>
@@ -15173,7 +15173,7 @@
           <p:cNvPr id="3" name="Content Placeholder 2">
             <a:extLst>
               <a:ext uri="{FF2B5EF4-FFF2-40B4-BE49-F238E27FC236}">
-                <a16:creationId xmlns:a16="http://schemas.microsoft.com/office/drawing/2014/main" id="{4FD408C2-0B18-D1D5-72EB-D9D35A18AC43}"/>
+                <a16:creationId xmlns:a16="http://schemas.microsoft.com/office/drawing/2014/main" id="{874CBF10-D574-4BED-FEA8-0AE25B68307F}"/>
               </a:ext>
             </a:extLst>
           </p:cNvPr>
@@ -15193,8 +15193,53 @@
               <a:buNone/>
             </a:pPr>
             <a:r>
-              <a:rPr lang="en-US"/>
-              <a:t>How to express the independence of attribute/method with the same name within a derived class?</a:t>
+              <a:rPr lang="en-VN"/>
+              <a:t>Viết 4 class HocSinhNam, HocSinhNu, GiaoVien, Nguoi.</a:t>
+            </a:r>
+          </a:p>
+          <a:p>
+            <a:pPr marL="0" indent="0">
+              <a:buNone/>
+            </a:pPr>
+            <a:r>
+              <a:rPr lang="en-VN"/>
+              <a:t>Biết rằng người có thuộc tính tên và năm sinh.</a:t>
+            </a:r>
+          </a:p>
+          <a:p>
+            <a:pPr marL="0" indent="0">
+              <a:buNone/>
+            </a:pPr>
+            <a:r>
+              <a:rPr lang="en-VN"/>
+              <a:t>Giáo viên có thêm thuộc tính lương</a:t>
+            </a:r>
+          </a:p>
+          <a:p>
+            <a:pPr marL="0" indent="0">
+              <a:buNone/>
+            </a:pPr>
+            <a:r>
+              <a:rPr lang="en-VN"/>
+              <a:t>Học sinh nam có thêm thuộc tính chiều cao</a:t>
+            </a:r>
+          </a:p>
+          <a:p>
+            <a:pPr marL="0" indent="0">
+              <a:buNone/>
+            </a:pPr>
+            <a:r>
+              <a:rPr lang="en-VN"/>
+              <a:t>Học sinh nữ có thêm thuộc tính cân nặng.</a:t>
+            </a:r>
+          </a:p>
+          <a:p>
+            <a:pPr marL="0" indent="0">
+              <a:buNone/>
+            </a:pPr>
+            <a:r>
+              <a:rPr lang="en-VN"/>
+              <a:t>Yêu cầu: implement 4 class này sử dụng kế thừa và viết </a:t>
             </a:r>
           </a:p>
           <a:p>
@@ -15203,29 +15248,12 @@
             </a:pPr>
             <a:r>
               <a:rPr lang="en-US"/>
-              <a:t>How about constructor/destructor chain?</a:t>
+              <a:t>C</a:t>
             </a:r>
-          </a:p>
-          <a:p>
-            <a:pPr marL="0" indent="0">
-              <a:buNone/>
-            </a:pPr>
             <a:r>
-              <a:rPr lang="en-US"/>
-              <a:t>How to resolve diamond problem?</a:t>
+              <a:rPr lang="en-VN"/>
+              <a:t>ác contrustor/destructor &amp; operator&lt;&lt; / operator &gt;&gt;</a:t>
             </a:r>
-          </a:p>
-          <a:p>
-            <a:pPr marL="0" indent="0">
-              <a:buNone/>
-            </a:pPr>
-            <a:endParaRPr lang="en-US"/>
-          </a:p>
-          <a:p>
-            <a:pPr marL="0" indent="0">
-              <a:buNone/>
-            </a:pPr>
-            <a:endParaRPr lang="en-VN"/>
           </a:p>
         </p:txBody>
       </p:sp>
@@ -15234,7 +15262,7 @@
           <p:cNvPr id="4" name="Slide Number Placeholder 3">
             <a:extLst>
               <a:ext uri="{FF2B5EF4-FFF2-40B4-BE49-F238E27FC236}">
-                <a16:creationId xmlns:a16="http://schemas.microsoft.com/office/drawing/2014/main" id="{4666BAF0-6831-EE82-67CD-5D241CE72241}"/>
+                <a16:creationId xmlns:a16="http://schemas.microsoft.com/office/drawing/2014/main" id="{7B6FA50D-121D-B2E4-6D2E-980C816E74CD}"/>
               </a:ext>
             </a:extLst>
           </p:cNvPr>
@@ -15253,6 +15281,155 @@
             <a:fld id="{8D5B5E1E-6446-E346-A8EF-B18E81FAF44B}" type="slidenum">
               <a:rPr lang="en-VN"/>
               <a:t>16</a:t>
+            </a:fld>
+            <a:endParaRPr lang="en-VN"/>
+          </a:p>
+        </p:txBody>
+      </p:sp>
+    </p:spTree>
+    <p:extLst>
+      <p:ext uri="{BB962C8B-B14F-4D97-AF65-F5344CB8AC3E}">
+        <p14:creationId xmlns:p14="http://schemas.microsoft.com/office/powerpoint/2010/main" val="962181958"/>
+      </p:ext>
+    </p:extLst>
+  </p:cSld>
+  <p:clrMapOvr>
+    <a:masterClrMapping/>
+  </p:clrMapOvr>
+</p:sld>
+</file>
+
+<file path=ppt/slides/slide17.xml><?xml version="1.0" encoding="utf-8"?>
+<p:sld xmlns:a="http://schemas.openxmlformats.org/drawingml/2006/main" xmlns:r="http://schemas.openxmlformats.org/officeDocument/2006/relationships" xmlns:p="http://schemas.openxmlformats.org/presentationml/2006/main">
+  <p:cSld>
+    <p:spTree>
+      <p:nvGrpSpPr>
+        <p:cNvPr id="1" name=""/>
+        <p:cNvGrpSpPr/>
+        <p:nvPr/>
+      </p:nvGrpSpPr>
+      <p:grpSpPr>
+        <a:xfrm>
+          <a:off x="0" y="0"/>
+          <a:ext cx="0" cy="0"/>
+          <a:chOff x="0" y="0"/>
+          <a:chExt cx="0" cy="0"/>
+        </a:xfrm>
+      </p:grpSpPr>
+      <p:sp>
+        <p:nvSpPr>
+          <p:cNvPr id="2" name="Title 1">
+            <a:extLst>
+              <a:ext uri="{FF2B5EF4-FFF2-40B4-BE49-F238E27FC236}">
+                <a16:creationId xmlns:a16="http://schemas.microsoft.com/office/drawing/2014/main" id="{22A05B3F-846C-1748-26A7-94E726E9D4A3}"/>
+              </a:ext>
+            </a:extLst>
+          </p:cNvPr>
+          <p:cNvSpPr>
+            <a:spLocks noGrp="1"/>
+          </p:cNvSpPr>
+          <p:nvPr>
+            <p:ph type="title"/>
+          </p:nvPr>
+        </p:nvSpPr>
+        <p:spPr/>
+        <p:txBody>
+          <a:bodyPr/>
+          <a:lstStyle/>
+          <a:p>
+            <a:r>
+              <a:rPr lang="en-US"/>
+              <a:t>Multiple inheritance (2/2)</a:t>
+            </a:r>
+            <a:endParaRPr lang="en-VN"/>
+          </a:p>
+        </p:txBody>
+      </p:sp>
+      <p:sp>
+        <p:nvSpPr>
+          <p:cNvPr id="3" name="Content Placeholder 2">
+            <a:extLst>
+              <a:ext uri="{FF2B5EF4-FFF2-40B4-BE49-F238E27FC236}">
+                <a16:creationId xmlns:a16="http://schemas.microsoft.com/office/drawing/2014/main" id="{4FD408C2-0B18-D1D5-72EB-D9D35A18AC43}"/>
+              </a:ext>
+            </a:extLst>
+          </p:cNvPr>
+          <p:cNvSpPr>
+            <a:spLocks noGrp="1"/>
+          </p:cNvSpPr>
+          <p:nvPr>
+            <p:ph idx="1"/>
+          </p:nvPr>
+        </p:nvSpPr>
+        <p:spPr/>
+        <p:txBody>
+          <a:bodyPr/>
+          <a:lstStyle/>
+          <a:p>
+            <a:pPr marL="0" indent="0">
+              <a:buNone/>
+            </a:pPr>
+            <a:r>
+              <a:rPr lang="en-US"/>
+              <a:t>How to express the independence of attribute/method with the same name within a derived class?</a:t>
+            </a:r>
+          </a:p>
+          <a:p>
+            <a:pPr marL="0" indent="0">
+              <a:buNone/>
+            </a:pPr>
+            <a:r>
+              <a:rPr lang="en-US"/>
+              <a:t>How about constructor/destructor chain?</a:t>
+            </a:r>
+          </a:p>
+          <a:p>
+            <a:pPr marL="0" indent="0">
+              <a:buNone/>
+            </a:pPr>
+            <a:r>
+              <a:rPr lang="en-US"/>
+              <a:t>How to resolve diamond problem?</a:t>
+            </a:r>
+          </a:p>
+          <a:p>
+            <a:pPr marL="0" indent="0">
+              <a:buNone/>
+            </a:pPr>
+            <a:endParaRPr lang="en-US"/>
+          </a:p>
+          <a:p>
+            <a:pPr marL="0" indent="0">
+              <a:buNone/>
+            </a:pPr>
+            <a:endParaRPr lang="en-VN"/>
+          </a:p>
+        </p:txBody>
+      </p:sp>
+      <p:sp>
+        <p:nvSpPr>
+          <p:cNvPr id="4" name="Slide Number Placeholder 3">
+            <a:extLst>
+              <a:ext uri="{FF2B5EF4-FFF2-40B4-BE49-F238E27FC236}">
+                <a16:creationId xmlns:a16="http://schemas.microsoft.com/office/drawing/2014/main" id="{4666BAF0-6831-EE82-67CD-5D241CE72241}"/>
+              </a:ext>
+            </a:extLst>
+          </p:cNvPr>
+          <p:cNvSpPr>
+            <a:spLocks noGrp="1"/>
+          </p:cNvSpPr>
+          <p:nvPr>
+            <p:ph type="sldNum" sz="quarter" idx="12"/>
+          </p:nvPr>
+        </p:nvSpPr>
+        <p:spPr/>
+        <p:txBody>
+          <a:bodyPr/>
+          <a:lstStyle/>
+          <a:p>
+            <a:fld id="{8D5B5E1E-6446-E346-A8EF-B18E81FAF44B}" type="slidenum">
+              <a:rPr lang="en-VN"/>
+              <a:t>17</a:t>
             </a:fld>
             <a:endParaRPr lang="en-VN"/>
           </a:p>
